--- a/final-LG-AI-Training-4hr.pptx
+++ b/final-LG-AI-Training-4hr.pptx
@@ -5,7 +5,7 @@
     <p:sldMasterId id="2147483648" r:id="rId1"/>
   </p:sldMasterIdLst>
   <p:notesMasterIdLst>
-    <p:notesMasterId r:id="rId46"/>
+    <p:notesMasterId r:id="rId45"/>
   </p:notesMasterIdLst>
   <p:sldIdLst>
     <p:sldId id="256" r:id="rId2"/>
@@ -42,16 +42,15 @@
     <p:sldId id="284" r:id="rId33"/>
     <p:sldId id="285" r:id="rId34"/>
     <p:sldId id="286" r:id="rId35"/>
-    <p:sldId id="287" r:id="rId36"/>
-    <p:sldId id="288" r:id="rId37"/>
-    <p:sldId id="289" r:id="rId38"/>
-    <p:sldId id="290" r:id="rId39"/>
-    <p:sldId id="291" r:id="rId40"/>
-    <p:sldId id="292" r:id="rId41"/>
-    <p:sldId id="293" r:id="rId42"/>
-    <p:sldId id="297" r:id="rId43"/>
-    <p:sldId id="298" r:id="rId44"/>
-    <p:sldId id="299" r:id="rId45"/>
+    <p:sldId id="288" r:id="rId36"/>
+    <p:sldId id="289" r:id="rId37"/>
+    <p:sldId id="290" r:id="rId38"/>
+    <p:sldId id="291" r:id="rId39"/>
+    <p:sldId id="292" r:id="rId40"/>
+    <p:sldId id="293" r:id="rId41"/>
+    <p:sldId id="297" r:id="rId42"/>
+    <p:sldId id="298" r:id="rId43"/>
+    <p:sldId id="299" r:id="rId44"/>
   </p:sldIdLst>
   <p:sldSz cx="12192000" cy="6858000"/>
   <p:notesSz cx="6858000" cy="12192000"/>
@@ -2738,7 +2737,7 @@
           <a:p>
             <a:r>
               <a:rPr lang="en-US" dirty="0"/>
-              <a:t>We build Sequential - simplest and most reliable.</a:t>
+              <a:t>Centrepiece demo.</a:t>
             </a:r>
           </a:p>
         </p:txBody>
@@ -2824,10 +2823,7 @@
           <a:bodyPr/>
           <a:lstStyle/>
           <a:p>
-            <a:r>
-              <a:rPr lang="en-US" dirty="0"/>
-              <a:t>Centrepiece demo.</a:t>
-            </a:r>
+            <a:endParaRPr lang="en-US" dirty="0"/>
           </a:p>
         </p:txBody>
       </p:sp>
@@ -2997,7 +2993,10 @@
           <a:bodyPr/>
           <a:lstStyle/>
           <a:p>
-            <a:endParaRPr lang="en-US" dirty="0"/>
+            <a:r>
+              <a:rPr lang="en-US" dirty="0"/>
+              <a:t>Close the loop.</a:t>
+            </a:r>
           </a:p>
         </p:txBody>
       </p:sp>
@@ -3084,7 +3083,7 @@
           <a:p>
             <a:r>
               <a:rPr lang="en-US" dirty="0"/>
-              <a:t>Close the loop.</a:t>
+              <a:t>The agent doesn't just answer, it records.</a:t>
             </a:r>
           </a:p>
         </p:txBody>
@@ -3258,10 +3257,7 @@
           <a:bodyPr/>
           <a:lstStyle/>
           <a:p>
-            <a:r>
-              <a:rPr lang="en-US" dirty="0"/>
-              <a:t>The agent doesn't just answer, it records.</a:t>
-            </a:r>
+            <a:endParaRPr lang="en-US" dirty="0"/>
           </a:p>
         </p:txBody>
       </p:sp>
@@ -3539,91 +3535,6 @@
               <a:rPr lang="en-US"/>
               <a:pPr/>
               <a:t>43</a:t>
-            </a:fld>
-            <a:endParaRPr lang="en-US"/>
-          </a:p>
-        </p:txBody>
-      </p:sp>
-    </p:spTree>
-    <p:extLst>
-      <p:ext uri="{BB962C8B-B14F-4D97-AF65-F5344CB8AC3E}">
-        <p14:creationId xmlns:p14="http://schemas.microsoft.com/office/powerpoint/2010/main" xmlns="" val="1024086991"/>
-      </p:ext>
-    </p:extLst>
-  </p:cSld>
-  <p:clrMapOvr>
-    <a:masterClrMapping/>
-  </p:clrMapOvr>
-</p:notes>
-</file>
-
-<file path=ppt/notesSlides/notesSlide44.xml><?xml version="1.0" encoding="utf-8"?>
-<p:notes xmlns:a="http://schemas.openxmlformats.org/drawingml/2006/main" xmlns:r="http://schemas.openxmlformats.org/officeDocument/2006/relationships" xmlns:p="http://schemas.openxmlformats.org/presentationml/2006/main">
-  <p:cSld>
-    <p:spTree>
-      <p:nvGrpSpPr>
-        <p:cNvPr id="1" name=""/>
-        <p:cNvGrpSpPr/>
-        <p:nvPr/>
-      </p:nvGrpSpPr>
-      <p:grpSpPr>
-        <a:xfrm>
-          <a:off x="0" y="0"/>
-          <a:ext cx="0" cy="0"/>
-          <a:chOff x="0" y="0"/>
-          <a:chExt cx="0" cy="0"/>
-        </a:xfrm>
-      </p:grpSpPr>
-      <p:sp>
-        <p:nvSpPr>
-          <p:cNvPr id="2" name="Slide Image Placeholder 1"/>
-          <p:cNvSpPr>
-            <a:spLocks noGrp="1" noRot="1" noChangeAspect="1"/>
-          </p:cNvSpPr>
-          <p:nvPr>
-            <p:ph type="sldImg"/>
-          </p:nvPr>
-        </p:nvSpPr>
-        <p:spPr/>
-      </p:sp>
-      <p:sp>
-        <p:nvSpPr>
-          <p:cNvPr id="3" name="Notes Placeholder 2"/>
-          <p:cNvSpPr>
-            <a:spLocks noGrp="1"/>
-          </p:cNvSpPr>
-          <p:nvPr>
-            <p:ph type="body" idx="1"/>
-          </p:nvPr>
-        </p:nvSpPr>
-        <p:spPr/>
-        <p:txBody>
-          <a:bodyPr/>
-          <a:lstStyle/>
-          <a:p>
-            <a:endParaRPr lang="en-US" dirty="0"/>
-          </a:p>
-        </p:txBody>
-      </p:sp>
-      <p:sp>
-        <p:nvSpPr>
-          <p:cNvPr id="4" name="Slide Number Placeholder 3"/>
-          <p:cNvSpPr>
-            <a:spLocks noGrp="1"/>
-          </p:cNvSpPr>
-          <p:nvPr>
-            <p:ph type="sldNum" sz="quarter" idx="10"/>
-          </p:nvPr>
-        </p:nvSpPr>
-        <p:spPr/>
-        <p:txBody>
-          <a:bodyPr/>
-          <a:lstStyle/>
-          <a:p>
-            <a:fld id="{F7021451-1387-4CA6-816F-3879F97B5CBC}" type="slidenum">
-              <a:rPr lang="en-US"/>
-              <a:pPr/>
-              <a:t>44</a:t>
             </a:fld>
             <a:endParaRPr lang="en-US"/>
           </a:p>
@@ -4589,8 +4500,8 @@
         </p:nvSpPr>
         <p:spPr>
           <a:xfrm>
-            <a:off x="841248" y="4023360"/>
-            <a:ext cx="10515600" cy="457200"/>
+            <a:off x="822960" y="3794760"/>
+            <a:ext cx="10515600" cy="597240"/>
           </a:xfrm>
           <a:prstGeom prst="rect">
             <a:avLst/>
@@ -4606,7 +4517,7 @@
               <a:buNone/>
             </a:pPr>
             <a:r>
-              <a:rPr lang="en-US" sz="2400" dirty="0">
+              <a:rPr lang="en-US" sz="2000" dirty="0">
                 <a:solidFill>
                   <a:srgbClr val="AAB4C0"/>
                 </a:solidFill>
@@ -4617,15 +4528,58 @@
               <a:t>Presented by </a:t>
             </a:r>
             <a:r>
-              <a:rPr lang="en-US" sz="2400" b="1" dirty="0">
-                <a:solidFill>
-                  <a:srgbClr val="E6EDF3"/>
-                </a:solidFill>
-                <a:latin typeface="Calibri" pitchFamily="34" charset="0"/>
-                <a:ea typeface="Calibri" pitchFamily="34" charset="-122"/>
-                <a:cs typeface="Calibri" pitchFamily="34" charset="-120"/>
-              </a:rPr>
-              <a:t>Arjun Thakur</a:t>
+              <a:rPr lang="en-US" sz="2000" b="1" dirty="0">
+                <a:solidFill>
+                  <a:srgbClr val="E6EDF3"/>
+                </a:solidFill>
+                <a:latin typeface="Calibri" pitchFamily="34" charset="0"/>
+                <a:ea typeface="Calibri" pitchFamily="34" charset="-122"/>
+                <a:cs typeface="Calibri" pitchFamily="34" charset="-120"/>
+              </a:rPr>
+              <a:t>Arjun </a:t>
+            </a:r>
+            <a:r>
+              <a:rPr lang="en-US" sz="2000" b="1" dirty="0" smtClean="0">
+                <a:solidFill>
+                  <a:srgbClr val="E6EDF3"/>
+                </a:solidFill>
+                <a:latin typeface="Calibri" pitchFamily="34" charset="0"/>
+                <a:ea typeface="Calibri" pitchFamily="34" charset="-122"/>
+                <a:cs typeface="Calibri" pitchFamily="34" charset="-120"/>
+              </a:rPr>
+              <a:t>Thakur</a:t>
+            </a:r>
+            <a:r>
+              <a:rPr lang="en-US" sz="2400" b="1" dirty="0" smtClean="0">
+                <a:solidFill>
+                  <a:srgbClr val="E6EDF3"/>
+                </a:solidFill>
+                <a:latin typeface="Calibri" pitchFamily="34" charset="0"/>
+                <a:ea typeface="Calibri" pitchFamily="34" charset="-122"/>
+                <a:cs typeface="Calibri" pitchFamily="34" charset="-120"/>
+              </a:rPr>
+              <a:t/>
+            </a:r>
+            <a:br>
+              <a:rPr lang="en-US" sz="2400" b="1" dirty="0" smtClean="0">
+                <a:solidFill>
+                  <a:srgbClr val="E6EDF3"/>
+                </a:solidFill>
+                <a:latin typeface="Calibri" pitchFamily="34" charset="0"/>
+                <a:ea typeface="Calibri" pitchFamily="34" charset="-122"/>
+                <a:cs typeface="Calibri" pitchFamily="34" charset="-120"/>
+              </a:rPr>
+            </a:br>
+            <a:r>
+              <a:rPr lang="en-US" sz="2400" b="1" dirty="0" smtClean="0">
+                <a:solidFill>
+                  <a:srgbClr val="E6EDF3"/>
+                </a:solidFill>
+                <a:latin typeface="Calibri" pitchFamily="34" charset="0"/>
+                <a:ea typeface="Calibri" pitchFamily="34" charset="-122"/>
+                <a:cs typeface="Calibri" pitchFamily="34" charset="-120"/>
+              </a:rPr>
+              <a:t>TechWareLearning.com</a:t>
             </a:r>
             <a:endParaRPr lang="en-US" sz="2400" dirty="0"/>
           </a:p>
@@ -4639,7 +4593,7 @@
         </p:nvSpPr>
         <p:spPr>
           <a:xfrm>
-            <a:off x="859536" y="4572000"/>
+            <a:off x="841248" y="4937760"/>
             <a:ext cx="10515600" cy="365760"/>
           </a:xfrm>
           <a:prstGeom prst="rect">
@@ -14442,206 +14396,6 @@
 
 <file path=ppt/slides/slide35.xml><?xml version="1.0" encoding="utf-8"?>
 <p:sld xmlns:a="http://schemas.openxmlformats.org/drawingml/2006/main" xmlns:r="http://schemas.openxmlformats.org/officeDocument/2006/relationships" xmlns:p="http://schemas.openxmlformats.org/presentationml/2006/main">
-  <p:cSld name="Slide 32">
-    <p:bg>
-      <p:bgPr>
-        <a:solidFill>
-          <a:srgbClr val="0B0F15"/>
-        </a:solidFill>
-        <a:effectLst/>
-      </p:bgPr>
-    </p:bg>
-    <p:spTree>
-      <p:nvGrpSpPr>
-        <p:cNvPr id="1" name=""/>
-        <p:cNvGrpSpPr/>
-        <p:nvPr/>
-      </p:nvGrpSpPr>
-      <p:grpSpPr>
-        <a:xfrm>
-          <a:off x="0" y="0"/>
-          <a:ext cx="0" cy="0"/>
-          <a:chOff x="0" y="0"/>
-          <a:chExt cx="0" cy="0"/>
-        </a:xfrm>
-      </p:grpSpPr>
-      <p:sp>
-        <p:nvSpPr>
-          <p:cNvPr id="2" name="Text 0"/>
-          <p:cNvSpPr/>
-          <p:nvPr/>
-        </p:nvSpPr>
-        <p:spPr>
-          <a:xfrm>
-            <a:off x="822960" y="6446520"/>
-            <a:ext cx="5486400" cy="274320"/>
-          </a:xfrm>
-          <a:prstGeom prst="rect">
-            <a:avLst/>
-          </a:prstGeom>
-          <a:noFill/>
-          <a:ln/>
-        </p:spPr>
-        <p:txBody>
-          <a:bodyPr wrap="square" rtlCol="0" anchor="ctr"/>
-          <a:lstStyle/>
-          <a:p>
-            <a:pPr marL="0" indent="0">
-              <a:buNone/>
-            </a:pPr>
-            <a:r>
-              <a:rPr lang="en-US" sz="1100" kern="0" spc="100" dirty="0">
-                <a:solidFill>
-                  <a:srgbClr val="AAB4C0"/>
-                </a:solidFill>
-                <a:latin typeface="Calibri" pitchFamily="34" charset="0"/>
-                <a:ea typeface="Calibri" pitchFamily="34" charset="-122"/>
-                <a:cs typeface="Calibri" pitchFamily="34" charset="-120"/>
-              </a:rPr>
-              <a:t>arjunthakur.dev</a:t>
-            </a:r>
-            <a:endParaRPr lang="en-US" sz="1100" dirty="0"/>
-          </a:p>
-        </p:txBody>
-      </p:sp>
-      <p:sp>
-        <p:nvSpPr>
-          <p:cNvPr id="3" name="Text 1"/>
-          <p:cNvSpPr/>
-          <p:nvPr/>
-        </p:nvSpPr>
-        <p:spPr>
-          <a:xfrm>
-            <a:off x="822960" y="566928"/>
-            <a:ext cx="10515600" cy="365760"/>
-          </a:xfrm>
-          <a:prstGeom prst="rect">
-            <a:avLst/>
-          </a:prstGeom>
-          <a:noFill/>
-          <a:ln/>
-        </p:spPr>
-        <p:txBody>
-          <a:bodyPr wrap="square" rtlCol="0" anchor="ctr"/>
-          <a:lstStyle/>
-          <a:p>
-            <a:pPr marL="0" indent="0">
-              <a:buNone/>
-            </a:pPr>
-            <a:r>
-              <a:rPr lang="en-US" sz="1400" b="1" kern="0" spc="400" dirty="0">
-                <a:solidFill>
-                  <a:srgbClr val="22D3EE"/>
-                </a:solidFill>
-                <a:latin typeface="Calibri" pitchFamily="34" charset="0"/>
-                <a:ea typeface="Calibri" pitchFamily="34" charset="-122"/>
-                <a:cs typeface="Calibri" pitchFamily="34" charset="-120"/>
-              </a:rPr>
-              <a:t>MODULE 4 · PATTERNS</a:t>
-            </a:r>
-            <a:endParaRPr lang="en-US" sz="1400" dirty="0"/>
-          </a:p>
-        </p:txBody>
-      </p:sp>
-      <p:sp>
-        <p:nvSpPr>
-          <p:cNvPr id="4" name="Text 2"/>
-          <p:cNvSpPr/>
-          <p:nvPr/>
-        </p:nvSpPr>
-        <p:spPr>
-          <a:xfrm>
-            <a:off x="822960" y="932688"/>
-            <a:ext cx="10607040" cy="640080"/>
-          </a:xfrm>
-          <a:prstGeom prst="rect">
-            <a:avLst/>
-          </a:prstGeom>
-          <a:noFill/>
-          <a:ln/>
-        </p:spPr>
-        <p:txBody>
-          <a:bodyPr wrap="square" rtlCol="0" anchor="ctr"/>
-          <a:lstStyle/>
-          <a:p>
-            <a:pPr marL="0" indent="0">
-              <a:buNone/>
-            </a:pPr>
-            <a:r>
-              <a:rPr lang="en-US" sz="3000" b="1" dirty="0">
-                <a:solidFill>
-                  <a:srgbClr val="E6EDF3"/>
-                </a:solidFill>
-                <a:latin typeface="Calibri" pitchFamily="34" charset="0"/>
-                <a:ea typeface="Calibri" pitchFamily="34" charset="-122"/>
-                <a:cs typeface="Calibri" pitchFamily="34" charset="-120"/>
-              </a:rPr>
-              <a:t>Three ways agents work together</a:t>
-            </a:r>
-            <a:endParaRPr lang="en-US" sz="3000" dirty="0"/>
-          </a:p>
-        </p:txBody>
-      </p:sp>
-      <p:sp>
-        <p:nvSpPr>
-          <p:cNvPr id="5" name="Shape 3"/>
-          <p:cNvSpPr/>
-          <p:nvPr/>
-        </p:nvSpPr>
-        <p:spPr>
-          <a:xfrm>
-            <a:off x="822960" y="1755648"/>
-            <a:ext cx="10543032" cy="4297680"/>
-          </a:xfrm>
-          <a:prstGeom prst="roundRect">
-            <a:avLst>
-              <a:gd name="adj" fmla="val 1702"/>
-            </a:avLst>
-          </a:prstGeom>
-          <a:solidFill>
-            <a:srgbClr val="0B0F15"/>
-          </a:solidFill>
-          <a:ln w="15875">
-            <a:solidFill>
-              <a:srgbClr val="1F2937"/>
-            </a:solidFill>
-            <a:prstDash val="solid"/>
-          </a:ln>
-        </p:spPr>
-      </p:sp>
-      <p:pic>
-        <p:nvPicPr>
-          <p:cNvPr id="6" name="Image 0" descr="preencoded.png"/>
-          <p:cNvPicPr>
-            <a:picLocks noChangeAspect="1"/>
-          </p:cNvPicPr>
-          <p:nvPr/>
-        </p:nvPicPr>
-        <p:blipFill>
-          <a:blip r:embed="rId3"/>
-          <a:srcRect/>
-          <a:stretch/>
-        </p:blipFill>
-        <p:spPr>
-          <a:xfrm>
-            <a:off x="960120" y="1892808"/>
-            <a:ext cx="10268712" cy="4023360"/>
-          </a:xfrm>
-          <a:prstGeom prst="rect">
-            <a:avLst/>
-          </a:prstGeom>
-        </p:spPr>
-      </p:pic>
-    </p:spTree>
-  </p:cSld>
-  <p:clrMapOvr>
-    <a:masterClrMapping/>
-  </p:clrMapOvr>
-</p:sld>
-</file>
-
-<file path=ppt/slides/slide36.xml><?xml version="1.0" encoding="utf-8"?>
-<p:sld xmlns:a="http://schemas.openxmlformats.org/drawingml/2006/main" xmlns:r="http://schemas.openxmlformats.org/officeDocument/2006/relationships" xmlns:p="http://schemas.openxmlformats.org/presentationml/2006/main">
   <p:cSld name="Slide 33">
     <p:bg>
       <p:bgPr>
@@ -14946,7 +14700,7 @@
 </p:sld>
 </file>
 
-<file path=ppt/slides/slide37.xml><?xml version="1.0" encoding="utf-8"?>
+<file path=ppt/slides/slide36.xml><?xml version="1.0" encoding="utf-8"?>
 <p:sld xmlns:a="http://schemas.openxmlformats.org/drawingml/2006/main" xmlns:r="http://schemas.openxmlformats.org/officeDocument/2006/relationships" xmlns:p="http://schemas.openxmlformats.org/presentationml/2006/main">
   <p:cSld name="Slide 34">
     <p:bg>
@@ -15252,7 +15006,7 @@
 </p:sld>
 </file>
 
-<file path=ppt/slides/slide38.xml><?xml version="1.0" encoding="utf-8"?>
+<file path=ppt/slides/slide37.xml><?xml version="1.0" encoding="utf-8"?>
 <p:sld xmlns:a="http://schemas.openxmlformats.org/drawingml/2006/main" xmlns:r="http://schemas.openxmlformats.org/officeDocument/2006/relationships" xmlns:p="http://schemas.openxmlformats.org/presentationml/2006/main">
   <p:cSld name="Slide 35">
     <p:bg>
@@ -15558,7 +15312,7 @@
 </p:sld>
 </file>
 
-<file path=ppt/slides/slide39.xml><?xml version="1.0" encoding="utf-8"?>
+<file path=ppt/slides/slide38.xml><?xml version="1.0" encoding="utf-8"?>
 <p:sld xmlns:a="http://schemas.openxmlformats.org/drawingml/2006/main" xmlns:r="http://schemas.openxmlformats.org/officeDocument/2006/relationships" xmlns:p="http://schemas.openxmlformats.org/presentationml/2006/main">
   <p:cSld name="Slide 36">
     <p:bg>
@@ -15906,6 +15660,206 @@
           </a:p>
         </p:txBody>
       </p:sp>
+    </p:spTree>
+  </p:cSld>
+  <p:clrMapOvr>
+    <a:masterClrMapping/>
+  </p:clrMapOvr>
+</p:sld>
+</file>
+
+<file path=ppt/slides/slide39.xml><?xml version="1.0" encoding="utf-8"?>
+<p:sld xmlns:a="http://schemas.openxmlformats.org/drawingml/2006/main" xmlns:r="http://schemas.openxmlformats.org/officeDocument/2006/relationships" xmlns:p="http://schemas.openxmlformats.org/presentationml/2006/main">
+  <p:cSld name="Slide 37">
+    <p:bg>
+      <p:bgPr>
+        <a:solidFill>
+          <a:srgbClr val="0B0F15"/>
+        </a:solidFill>
+        <a:effectLst/>
+      </p:bgPr>
+    </p:bg>
+    <p:spTree>
+      <p:nvGrpSpPr>
+        <p:cNvPr id="1" name=""/>
+        <p:cNvGrpSpPr/>
+        <p:nvPr/>
+      </p:nvGrpSpPr>
+      <p:grpSpPr>
+        <a:xfrm>
+          <a:off x="0" y="0"/>
+          <a:ext cx="0" cy="0"/>
+          <a:chOff x="0" y="0"/>
+          <a:chExt cx="0" cy="0"/>
+        </a:xfrm>
+      </p:grpSpPr>
+      <p:sp>
+        <p:nvSpPr>
+          <p:cNvPr id="2" name="Text 0"/>
+          <p:cNvSpPr/>
+          <p:nvPr/>
+        </p:nvSpPr>
+        <p:spPr>
+          <a:xfrm>
+            <a:off x="822960" y="6446520"/>
+            <a:ext cx="5486400" cy="274320"/>
+          </a:xfrm>
+          <a:prstGeom prst="rect">
+            <a:avLst/>
+          </a:prstGeom>
+          <a:noFill/>
+          <a:ln/>
+        </p:spPr>
+        <p:txBody>
+          <a:bodyPr wrap="square" rtlCol="0" anchor="ctr"/>
+          <a:lstStyle/>
+          <a:p>
+            <a:pPr marL="0" indent="0">
+              <a:buNone/>
+            </a:pPr>
+            <a:r>
+              <a:rPr lang="en-US" sz="1100" kern="0" spc="100" dirty="0">
+                <a:solidFill>
+                  <a:srgbClr val="AAB4C0"/>
+                </a:solidFill>
+                <a:latin typeface="Calibri" pitchFamily="34" charset="0"/>
+                <a:ea typeface="Calibri" pitchFamily="34" charset="-122"/>
+                <a:cs typeface="Calibri" pitchFamily="34" charset="-120"/>
+              </a:rPr>
+              <a:t>arjunthakur.dev</a:t>
+            </a:r>
+            <a:endParaRPr lang="en-US" sz="1100" dirty="0"/>
+          </a:p>
+        </p:txBody>
+      </p:sp>
+      <p:sp>
+        <p:nvSpPr>
+          <p:cNvPr id="3" name="Text 1"/>
+          <p:cNvSpPr/>
+          <p:nvPr/>
+        </p:nvSpPr>
+        <p:spPr>
+          <a:xfrm>
+            <a:off x="822960" y="566928"/>
+            <a:ext cx="10515600" cy="365760"/>
+          </a:xfrm>
+          <a:prstGeom prst="rect">
+            <a:avLst/>
+          </a:prstGeom>
+          <a:noFill/>
+          <a:ln/>
+        </p:spPr>
+        <p:txBody>
+          <a:bodyPr wrap="square" rtlCol="0" anchor="ctr"/>
+          <a:lstStyle/>
+          <a:p>
+            <a:pPr marL="0" indent="0">
+              <a:buNone/>
+            </a:pPr>
+            <a:r>
+              <a:rPr lang="en-US" sz="1400" b="1" kern="0" spc="400" dirty="0">
+                <a:solidFill>
+                  <a:srgbClr val="22D3EE"/>
+                </a:solidFill>
+                <a:latin typeface="Calibri" pitchFamily="34" charset="0"/>
+                <a:ea typeface="Calibri" pitchFamily="34" charset="-122"/>
+                <a:cs typeface="Calibri" pitchFamily="34" charset="-120"/>
+              </a:rPr>
+              <a:t>MODULE 4 · THE FULL PICTURE</a:t>
+            </a:r>
+            <a:endParaRPr lang="en-US" sz="1400" dirty="0"/>
+          </a:p>
+        </p:txBody>
+      </p:sp>
+      <p:sp>
+        <p:nvSpPr>
+          <p:cNvPr id="4" name="Text 2"/>
+          <p:cNvSpPr/>
+          <p:nvPr/>
+        </p:nvSpPr>
+        <p:spPr>
+          <a:xfrm>
+            <a:off x="822960" y="932688"/>
+            <a:ext cx="10607040" cy="640080"/>
+          </a:xfrm>
+          <a:prstGeom prst="rect">
+            <a:avLst/>
+          </a:prstGeom>
+          <a:noFill/>
+          <a:ln/>
+        </p:spPr>
+        <p:txBody>
+          <a:bodyPr wrap="square" rtlCol="0" anchor="ctr"/>
+          <a:lstStyle/>
+          <a:p>
+            <a:pPr marL="0" indent="0">
+              <a:buNone/>
+            </a:pPr>
+            <a:r>
+              <a:rPr lang="en-US" sz="3000" b="1" dirty="0">
+                <a:solidFill>
+                  <a:srgbClr val="E6EDF3"/>
+                </a:solidFill>
+                <a:latin typeface="Calibri" pitchFamily="34" charset="0"/>
+                <a:ea typeface="Calibri" pitchFamily="34" charset="-122"/>
+                <a:cs typeface="Calibri" pitchFamily="34" charset="-120"/>
+              </a:rPr>
+              <a:t>Question to logged decision</a:t>
+            </a:r>
+            <a:endParaRPr lang="en-US" sz="3000" dirty="0"/>
+          </a:p>
+        </p:txBody>
+      </p:sp>
+      <p:sp>
+        <p:nvSpPr>
+          <p:cNvPr id="5" name="Shape 3"/>
+          <p:cNvSpPr/>
+          <p:nvPr/>
+        </p:nvSpPr>
+        <p:spPr>
+          <a:xfrm>
+            <a:off x="822960" y="1755648"/>
+            <a:ext cx="10543032" cy="4297680"/>
+          </a:xfrm>
+          <a:prstGeom prst="roundRect">
+            <a:avLst>
+              <a:gd name="adj" fmla="val 1702"/>
+            </a:avLst>
+          </a:prstGeom>
+          <a:solidFill>
+            <a:srgbClr val="0B0F15"/>
+          </a:solidFill>
+          <a:ln w="15875">
+            <a:solidFill>
+              <a:srgbClr val="1F2937"/>
+            </a:solidFill>
+            <a:prstDash val="solid"/>
+          </a:ln>
+        </p:spPr>
+      </p:sp>
+      <p:pic>
+        <p:nvPicPr>
+          <p:cNvPr id="6" name="Image 0" descr="preencoded.png"/>
+          <p:cNvPicPr>
+            <a:picLocks noChangeAspect="1"/>
+          </p:cNvPicPr>
+          <p:nvPr/>
+        </p:nvPicPr>
+        <p:blipFill>
+          <a:blip r:embed="rId3"/>
+          <a:srcRect/>
+          <a:stretch/>
+        </p:blipFill>
+        <p:spPr>
+          <a:xfrm>
+            <a:off x="960120" y="1892808"/>
+            <a:ext cx="10268712" cy="4023360"/>
+          </a:xfrm>
+          <a:prstGeom prst="rect">
+            <a:avLst/>
+          </a:prstGeom>
+        </p:spPr>
+      </p:pic>
     </p:spTree>
   </p:cSld>
   <p:clrMapOvr>
@@ -16200,206 +16154,6 @@
 
 <file path=ppt/slides/slide40.xml><?xml version="1.0" encoding="utf-8"?>
 <p:sld xmlns:a="http://schemas.openxmlformats.org/drawingml/2006/main" xmlns:r="http://schemas.openxmlformats.org/officeDocument/2006/relationships" xmlns:p="http://schemas.openxmlformats.org/presentationml/2006/main">
-  <p:cSld name="Slide 37">
-    <p:bg>
-      <p:bgPr>
-        <a:solidFill>
-          <a:srgbClr val="0B0F15"/>
-        </a:solidFill>
-        <a:effectLst/>
-      </p:bgPr>
-    </p:bg>
-    <p:spTree>
-      <p:nvGrpSpPr>
-        <p:cNvPr id="1" name=""/>
-        <p:cNvGrpSpPr/>
-        <p:nvPr/>
-      </p:nvGrpSpPr>
-      <p:grpSpPr>
-        <a:xfrm>
-          <a:off x="0" y="0"/>
-          <a:ext cx="0" cy="0"/>
-          <a:chOff x="0" y="0"/>
-          <a:chExt cx="0" cy="0"/>
-        </a:xfrm>
-      </p:grpSpPr>
-      <p:sp>
-        <p:nvSpPr>
-          <p:cNvPr id="2" name="Text 0"/>
-          <p:cNvSpPr/>
-          <p:nvPr/>
-        </p:nvSpPr>
-        <p:spPr>
-          <a:xfrm>
-            <a:off x="822960" y="6446520"/>
-            <a:ext cx="5486400" cy="274320"/>
-          </a:xfrm>
-          <a:prstGeom prst="rect">
-            <a:avLst/>
-          </a:prstGeom>
-          <a:noFill/>
-          <a:ln/>
-        </p:spPr>
-        <p:txBody>
-          <a:bodyPr wrap="square" rtlCol="0" anchor="ctr"/>
-          <a:lstStyle/>
-          <a:p>
-            <a:pPr marL="0" indent="0">
-              <a:buNone/>
-            </a:pPr>
-            <a:r>
-              <a:rPr lang="en-US" sz="1100" kern="0" spc="100" dirty="0">
-                <a:solidFill>
-                  <a:srgbClr val="AAB4C0"/>
-                </a:solidFill>
-                <a:latin typeface="Calibri" pitchFamily="34" charset="0"/>
-                <a:ea typeface="Calibri" pitchFamily="34" charset="-122"/>
-                <a:cs typeface="Calibri" pitchFamily="34" charset="-120"/>
-              </a:rPr>
-              <a:t>arjunthakur.dev</a:t>
-            </a:r>
-            <a:endParaRPr lang="en-US" sz="1100" dirty="0"/>
-          </a:p>
-        </p:txBody>
-      </p:sp>
-      <p:sp>
-        <p:nvSpPr>
-          <p:cNvPr id="3" name="Text 1"/>
-          <p:cNvSpPr/>
-          <p:nvPr/>
-        </p:nvSpPr>
-        <p:spPr>
-          <a:xfrm>
-            <a:off x="822960" y="566928"/>
-            <a:ext cx="10515600" cy="365760"/>
-          </a:xfrm>
-          <a:prstGeom prst="rect">
-            <a:avLst/>
-          </a:prstGeom>
-          <a:noFill/>
-          <a:ln/>
-        </p:spPr>
-        <p:txBody>
-          <a:bodyPr wrap="square" rtlCol="0" anchor="ctr"/>
-          <a:lstStyle/>
-          <a:p>
-            <a:pPr marL="0" indent="0">
-              <a:buNone/>
-            </a:pPr>
-            <a:r>
-              <a:rPr lang="en-US" sz="1400" b="1" kern="0" spc="400" dirty="0">
-                <a:solidFill>
-                  <a:srgbClr val="22D3EE"/>
-                </a:solidFill>
-                <a:latin typeface="Calibri" pitchFamily="34" charset="0"/>
-                <a:ea typeface="Calibri" pitchFamily="34" charset="-122"/>
-                <a:cs typeface="Calibri" pitchFamily="34" charset="-120"/>
-              </a:rPr>
-              <a:t>MODULE 4 · THE FULL PICTURE</a:t>
-            </a:r>
-            <a:endParaRPr lang="en-US" sz="1400" dirty="0"/>
-          </a:p>
-        </p:txBody>
-      </p:sp>
-      <p:sp>
-        <p:nvSpPr>
-          <p:cNvPr id="4" name="Text 2"/>
-          <p:cNvSpPr/>
-          <p:nvPr/>
-        </p:nvSpPr>
-        <p:spPr>
-          <a:xfrm>
-            <a:off x="822960" y="932688"/>
-            <a:ext cx="10607040" cy="640080"/>
-          </a:xfrm>
-          <a:prstGeom prst="rect">
-            <a:avLst/>
-          </a:prstGeom>
-          <a:noFill/>
-          <a:ln/>
-        </p:spPr>
-        <p:txBody>
-          <a:bodyPr wrap="square" rtlCol="0" anchor="ctr"/>
-          <a:lstStyle/>
-          <a:p>
-            <a:pPr marL="0" indent="0">
-              <a:buNone/>
-            </a:pPr>
-            <a:r>
-              <a:rPr lang="en-US" sz="3000" b="1" dirty="0">
-                <a:solidFill>
-                  <a:srgbClr val="E6EDF3"/>
-                </a:solidFill>
-                <a:latin typeface="Calibri" pitchFamily="34" charset="0"/>
-                <a:ea typeface="Calibri" pitchFamily="34" charset="-122"/>
-                <a:cs typeface="Calibri" pitchFamily="34" charset="-120"/>
-              </a:rPr>
-              <a:t>Question to logged decision</a:t>
-            </a:r>
-            <a:endParaRPr lang="en-US" sz="3000" dirty="0"/>
-          </a:p>
-        </p:txBody>
-      </p:sp>
-      <p:sp>
-        <p:nvSpPr>
-          <p:cNvPr id="5" name="Shape 3"/>
-          <p:cNvSpPr/>
-          <p:nvPr/>
-        </p:nvSpPr>
-        <p:spPr>
-          <a:xfrm>
-            <a:off x="822960" y="1755648"/>
-            <a:ext cx="10543032" cy="4297680"/>
-          </a:xfrm>
-          <a:prstGeom prst="roundRect">
-            <a:avLst>
-              <a:gd name="adj" fmla="val 1702"/>
-            </a:avLst>
-          </a:prstGeom>
-          <a:solidFill>
-            <a:srgbClr val="0B0F15"/>
-          </a:solidFill>
-          <a:ln w="15875">
-            <a:solidFill>
-              <a:srgbClr val="1F2937"/>
-            </a:solidFill>
-            <a:prstDash val="solid"/>
-          </a:ln>
-        </p:spPr>
-      </p:sp>
-      <p:pic>
-        <p:nvPicPr>
-          <p:cNvPr id="6" name="Image 0" descr="preencoded.png"/>
-          <p:cNvPicPr>
-            <a:picLocks noChangeAspect="1"/>
-          </p:cNvPicPr>
-          <p:nvPr/>
-        </p:nvPicPr>
-        <p:blipFill>
-          <a:blip r:embed="rId3"/>
-          <a:srcRect/>
-          <a:stretch/>
-        </p:blipFill>
-        <p:spPr>
-          <a:xfrm>
-            <a:off x="960120" y="1892808"/>
-            <a:ext cx="10268712" cy="4023360"/>
-          </a:xfrm>
-          <a:prstGeom prst="rect">
-            <a:avLst/>
-          </a:prstGeom>
-        </p:spPr>
-      </p:pic>
-    </p:spTree>
-  </p:cSld>
-  <p:clrMapOvr>
-    <a:masterClrMapping/>
-  </p:clrMapOvr>
-</p:sld>
-</file>
-
-<file path=ppt/slides/slide41.xml><?xml version="1.0" encoding="utf-8"?>
-<p:sld xmlns:a="http://schemas.openxmlformats.org/drawingml/2006/main" xmlns:r="http://schemas.openxmlformats.org/officeDocument/2006/relationships" xmlns:p="http://schemas.openxmlformats.org/presentationml/2006/main">
   <p:cSld name="Slide 38">
     <p:bg>
       <p:bgPr>
@@ -16626,7 +16380,7 @@
 </p:sld>
 </file>
 
-<file path=ppt/slides/slide42.xml><?xml version="1.0" encoding="utf-8"?>
+<file path=ppt/slides/slide41.xml><?xml version="1.0" encoding="utf-8"?>
 <p:sld xmlns:a="http://schemas.openxmlformats.org/drawingml/2006/main" xmlns:r="http://schemas.openxmlformats.org/officeDocument/2006/relationships" xmlns:p="http://schemas.openxmlformats.org/presentationml/2006/main">
   <p:cSld name="Slide 42">
     <p:bg>
@@ -16910,7 +16664,7 @@
 </p:sld>
 </file>
 
-<file path=ppt/slides/slide43.xml><?xml version="1.0" encoding="utf-8"?>
+<file path=ppt/slides/slide42.xml><?xml version="1.0" encoding="utf-8"?>
 <p:sld xmlns:a="http://schemas.openxmlformats.org/drawingml/2006/main" xmlns:r="http://schemas.openxmlformats.org/officeDocument/2006/relationships" xmlns:p="http://schemas.openxmlformats.org/presentationml/2006/main">
   <p:cSld name="Slide 43">
     <p:bg>
@@ -17216,7 +16970,7 @@
 </p:sld>
 </file>
 
-<file path=ppt/slides/slide44.xml><?xml version="1.0" encoding="utf-8"?>
+<file path=ppt/slides/slide43.xml><?xml version="1.0" encoding="utf-8"?>
 <p:sld xmlns:a="http://schemas.openxmlformats.org/drawingml/2006/main" xmlns:r="http://schemas.openxmlformats.org/officeDocument/2006/relationships" xmlns:p="http://schemas.openxmlformats.org/presentationml/2006/main">
   <p:cSld name="Slide 44">
     <p:bg>
